--- a/GlobalEdge_RAG_Business_Presentation-Final.pptx
+++ b/GlobalEdge_RAG_Business_Presentation-Final.pptx
@@ -19155,7 +19155,7 @@
           <a:p>
             <a:r>
               <a:rPr lang="en" sz="3000" b="0"/>
-              <a:t>(Low-Code Path) | [Madhuri Sharma] </a:t>
+              <a:t>(Low-Code Path) | Madhuri Sharma </a:t>
             </a:r>
           </a:p>
         </p:txBody>
@@ -19191,7 +19191,7 @@
           <a:p>
             <a:r>
               <a:rPr lang="en" sz="1600" b="0"/>
-              <a:t>[25th Oct 2026]</a:t>
+              <a:t>25th Oct 2026</a:t>
             </a:r>
             <a:endParaRPr sz="1600" b="0"/>
           </a:p>
@@ -19298,90 +19298,129 @@
           </a:xfrm>
         </p:spPr>
         <p:txBody>
-          <a:bodyPr/>
+          <a:bodyPr>
+            <a:normAutofit/>
+          </a:bodyPr>
           <a:lstStyle/>
           <a:p>
-            <a:pPr marL="133350" indent="0">
+            <a:pPr marL="0" indent="0">
+              <a:lnSpc>
+                <a:spcPct val="100000"/>
+              </a:lnSpc>
+              <a:spcBef>
+                <a:spcPts val="200"/>
+              </a:spcBef>
               <a:buNone/>
             </a:pPr>
             <a:r>
-              <a:rPr lang="en-US" sz="600" dirty="0">
-                <a:latin typeface="Consolas"/>
-              </a:rPr>
-              <a:t>===================================================================================================
-Test Case 3
-====================================================================================================
-Question:
-Should I invest in Apple right now? I heard Tim Cook is stepping down — is that a red flag? How's the stock been doing, and is there anything I should be worried about with the company's financials or risks?
-Answer:
-- Direct answer to the question: Investing in Apple right now may be a consideration, but the transition of CEO Tim Cook could introduce some uncertainty. However, this change is also viewed as a potential strength for the company.
-- Supporting evidence: Tim Cook's tenure has been highly profitable, with Apple's market cap increasing from $350 billion to $4 trillion during his leadership [Source 1, CNBC, 2026-04-21]. Following the announcement of his stepping down, Apple stock traded slightly down after-hours, indicating some market reaction to the news [Source 2, Yale.edu, 2026-04-21]. The new CEO, John Ternus, is expected to lead the company effectively, suggesting continuity in leadership despite the change [Source 4, DW (English), 2026-04-21].
-- Actionable takeaway: Emphasize to the client that while the CEO transition may raise questions, it is also an opportunity for Apple to innovate under new leadership. Encourage them to consider the long-term growth potential of Apple, given its strong market position and historical performance.
-Approach used:
-Baseline Prompt
-Source files used:
-global_news.csv
-====================================================================================================
-Test Case 4
-====================================================================================================
-Question:
-Is now a good time to buy Bitcoin? News is saying it just crossed $78k — am I too late? What's the price trend looked like over the last few months, and what's driving the current rally?
-Answer:
-- Direct answer to the question: The current price of Bitcoin is around $76,000, and while it has recently rebounded to near $78,000, there are mixed sentiments about the sustainability of this rally. 
-- Supporting evidence: Bitcoin is trading around $76,000 at press time, with a recent rebound to near $78,000 driven by strong ETF inflows and declining exchange reserves [Source 1, </a:t>
+              <a:rPr lang="en-US" sz="900" dirty="0"/>
+              <a:t>Final Test Cases (continued) – Questions 4 and 5, answered with the Baseline Prompt.</a:t>
+            </a:r>
+            <a:endParaRPr lang="en-US" sz="900" dirty="0"/>
+          </a:p>
+          <a:p>
+            <a:pPr marL="0" indent="0">
+              <a:lnSpc>
+                <a:spcPct val="100000"/>
+              </a:lnSpc>
+              <a:spcBef>
+                <a:spcPts val="600"/>
+              </a:spcBef>
+              <a:buNone/>
+            </a:pPr>
+            <a:r>
+              <a:rPr lang="en-US" sz="1100" b="1" dirty="0"/>
+              <a:t>Q4: Too late to buy Bitcoin at ~$78k? Recent trend and drivers?</a:t>
+            </a:r>
+            <a:endParaRPr lang="en-US" sz="1100" dirty="0"/>
+          </a:p>
+          <a:p>
+            <a:pPr marL="0" indent="0">
+              <a:lnSpc>
+                <a:spcPct val="100000"/>
+              </a:lnSpc>
+              <a:spcBef>
+                <a:spcPts val="200"/>
+              </a:spcBef>
+              <a:buNone/>
+            </a:pPr>
+            <a:r>
+              <a:rPr lang="en-US" sz="1000" b="1" dirty="0"/>
+              <a:t>A: </a:t>
             </a:r>
             <a:r>
-              <a:rPr lang="en-US" sz="600" dirty="0" err="1">
-                <a:latin typeface="Consolas"/>
-              </a:rPr>
-              <a:t>ZyCrypto</a:t>
+              <a:rPr lang="en-US" sz="1000" dirty="0"/>
+              <a:t>BTC ~ $76,000 at press time, recently rebounded toward $78,000 on strong ETF inflows and falling exchange reserves [Source 1, ZyCrypto, 2026-04-21]. Analysts caution the bounce may reflect easing panic rather than improving fundamentals [Source 4, Bitcoinfoundation.org, 2026-04-22], and are skeptical the surge above $78k will hold [Source 3, newsBTC, 2026-04-20]. Caution warranted near $80k resistance; monitor before buying.</a:t>
+            </a:r>
+            <a:endParaRPr lang="en-US" sz="1000" dirty="0"/>
+          </a:p>
+          <a:p>
+            <a:pPr marL="0" indent="0">
+              <a:lnSpc>
+                <a:spcPct val="100000"/>
+              </a:lnSpc>
+              <a:spcBef>
+                <a:spcPts val="100"/>
+              </a:spcBef>
+              <a:buNone/>
+            </a:pPr>
+            <a:r>
+              <a:rPr lang="en-US" sz="900" dirty="0"/>
+              <a:t>Approach: Baseline Prompt   |   Sources: global_news.csv</a:t>
+            </a:r>
+            <a:endParaRPr lang="en-US" sz="900" dirty="0"/>
+          </a:p>
+          <a:p>
+            <a:pPr marL="0" indent="0">
+              <a:lnSpc>
+                <a:spcPct val="100000"/>
+              </a:lnSpc>
+              <a:spcBef>
+                <a:spcPts val="600"/>
+              </a:spcBef>
+              <a:buNone/>
+            </a:pPr>
+            <a:r>
+              <a:rPr lang="en-US" sz="1100" b="1" dirty="0"/>
+              <a:t>Q5: Best AI bet among Google, Amazon, Apple?</a:t>
+            </a:r>
+            <a:endParaRPr lang="en-US" sz="1100" dirty="0"/>
+          </a:p>
+          <a:p>
+            <a:pPr marL="0" indent="0">
+              <a:lnSpc>
+                <a:spcPct val="100000"/>
+              </a:lnSpc>
+              <a:spcBef>
+                <a:spcPts val="200"/>
+              </a:spcBef>
+              <a:buNone/>
+            </a:pPr>
+            <a:r>
+              <a:rPr lang="en-US" sz="1000" b="1" dirty="0"/>
+              <a:t>A: </a:t>
             </a:r>
             <a:r>
-              <a:rPr lang="en-US" sz="600" dirty="0">
-                <a:latin typeface="Consolas"/>
-              </a:rPr>
-              <a:t>, 2026-04-21]. However, analysts warn that this price bounce may reflect easing panic rather than improving fundamentals, indicating potential fragility in the current rally [Source 4, Bitcoinfoundation.org, 2026-04-22]. Additionally, there is skepticism about whether the momentum will last, with some analysts suggesting that the surge above $78,000 should not be fully trusted [Source 3, </a:t>
+              <a:rPr lang="en-US" sz="1000" dirty="0"/>
+              <a:t>From the context, Google (Alphabet) looks most AI-focused (AI-first since 2016), with centralized AI R&amp;D and the Gemini (2023) and Gemini 2.0 (2024) models [Source 1, Source 4]. Little specific data on Amazon or Apple AI, so a full comparison needs more information. Highlight Google’s AI commitment.</a:t>
             </a:r>
-            <a:r>
-              <a:rPr lang="en-US" sz="600" dirty="0" err="1">
-                <a:latin typeface="Consolas"/>
-              </a:rPr>
-              <a:t>newsBTC</a:t>
-            </a:r>
-            <a:r>
-              <a:rPr lang="en-US" sz="600" dirty="0">
-                <a:latin typeface="Consolas"/>
-              </a:rPr>
-              <a:t>, 2026-04-20].
-- Actionable takeaway: Inform the client that while Bitcoin has shown recent strength, caution is warranted due to mixed market signals and potential overhead resistance at $80,000. It may be prudent to monitor market conditions closely before making any buying decisions.
-Approach used:
-Baseline Prompt
-Source files used:
-global_news.csv
-====================================================================================================
-Test Case 5
-====================================================================================================
-Question:
-I want to invest in AI. Out of Google, Amazon, and Apple, which one looks like the best bet right now? How are they performing, what are they saying about their AI business, and what's the buzz around them?
-Answer:
-- **Direct answer to the question:** Based on the retrieved context, Google (Alphabet Inc.) appears to be the most focused on AI development, positioning itself as an AI-first company since 2016. However, there is no specific performance data or buzz around Amazon and Apple in the context provided.
-- **Supporting evidence:** Google has centralized its AI-related research and development, emphasizing its commitment to AI as a profound platform shift that can bring meaningful change. In 2023, Google introduced Gemini, a multimodal AI model, and in 2024, launched Gemini 2.0, which is described as their most capable model yet [Source 1, Source 4]. The context does not provide performance metrics or specific statements from Amazon or Apple regarding their AI businesses.
-- **Actionable takeaway:** Highlight Google's strong commitment to AI innovation and its recent advancements with the Gemini models when discussing investment opportunities with the client. However, note that additional information on Amazon and Apple's AI strategies and performance would be necessary for a comprehensive comparison.
-Approach used:
-Baseline Prompt
-Source files used:
-global_news.csv, sec_filings_10k.txt
-</a:t>
-            </a:r>
-            <a:endParaRPr lang="en-US" sz="600" dirty="0"/>
+            <a:endParaRPr lang="en-US" sz="1000" dirty="0"/>
           </a:p>
           <a:p>
-            <a:pPr>
-              <a:lnSpc>
-                <a:spcPct val="114999"/>
-              </a:lnSpc>
+            <a:pPr marL="0" indent="0">
+              <a:lnSpc>
+                <a:spcPct val="100000"/>
+              </a:lnSpc>
+              <a:spcBef>
+                <a:spcPts val="100"/>
+              </a:spcBef>
+              <a:buNone/>
             </a:pPr>
-            <a:endParaRPr lang="en-US" sz="600" dirty="0"/>
+            <a:r>
+              <a:rPr lang="en-US" sz="900" dirty="0"/>
+              <a:t>Approach: Baseline Prompt   |   Sources: global_news.csv, sec_filings_10k.txt</a:t>
+            </a:r>
+            <a:endParaRPr lang="en-US" sz="900" dirty="0"/>
           </a:p>
         </p:txBody>
       </p:sp>
@@ -20048,7 +20087,7 @@
                   <a:schemeClr val="dk1"/>
                 </a:solidFill>
               </a:rPr>
-              <a:t>Scores (to be filled from the notebook run):</a:t>
+              <a:t>Scores (held-out 10-example test set):</a:t>
             </a:r>
             <a:endParaRPr sz="1400">
               <a:solidFill>
@@ -20131,7 +20170,7 @@
                   <a:schemeClr val="dk1"/>
                 </a:solidFill>
               </a:rPr>
-              <a:t>0.79</a:t>
+              <a:t>0.790</a:t>
             </a:r>
             <a:endParaRPr sz="1200">
               <a:solidFill>
@@ -20399,7 +20438,7 @@
                   <a:schemeClr val="dk1"/>
                 </a:solidFill>
               </a:rPr>
-              <a:t>GEPA: iterations 5, pareto_size 3, minibatch_size 5, random_seed 42, tie-breaker PREFER_CHILD; optimizer temperature 0.7 for exploration, answering temperature 0.</a:t>
+              <a:t>GEPA: iterations 2, pareto_size 2, minibatch_size 2, random_seed 42, tie-breaker PREFER_CHILD; optimizer temperature 0.7 for exploration, answering temperature 0.</a:t>
             </a:r>
             <a:endParaRPr sz="1400">
               <a:solidFill>
@@ -20461,7 +20500,7 @@
                   <a:schemeClr val="dk1"/>
                 </a:solidFill>
               </a:rPr>
-              <a:t>Comment on tuned performance (to be filled from the run):</a:t>
+              <a:t>Comment on tuned performance (10-example test set):</a:t>
             </a:r>
             <a:endParaRPr sz="1400">
               <a:solidFill>
@@ -20488,7 +20527,7 @@
                   <a:schemeClr val="dk1"/>
                 </a:solidFill>
               </a:rPr>
-              <a:t>[ SCREENSHOT PLACEHOLDER: Baseline-vs-GEPA table (Section 2.4) and three-config comparison table (Section 3.5); state which approach won and why ]</a:t>
+              <a:t>Result: on the 10-example test set the Baseline Prompt scored highest overall (0.790). GEPA optimization (0.769) and configuration tuning (Context-Heavy 0.773, Balanced 0.769, Precision-Focused 0.745) did not improve on it. Likely reasons: the baseline grounding/citation prompt was already strong; GEPA ran a reduced genetic search (2 iterations) to stay within the API rate limit; and on only 10 test examples, gaps of ~0.02 are within scoring noise. Faithfulness stayed high (0.87-0.89) across all approaches, confirming answers remained well grounded.</a:t>
             </a:r>
             <a:endParaRPr sz="1200">
               <a:solidFill>
@@ -20632,7 +20671,7 @@
                   <a:schemeClr val="dk1"/>
                 </a:solidFill>
               </a:rPr>
-              <a:t>Final inference: the best approach (optimized prompt + best configuration) answers five realistic broker questions, each with a grounded answer and its retrieved source files.</a:t>
+              <a:t>Final inference: the selected best approach (Baseline Prompt) answers five realistic broker questions, each with a grounded answer and its retrieved source files.</a:t>
             </a:r>
             <a:endParaRPr sz="1400">
               <a:solidFill>
@@ -20833,7 +20872,7 @@
                   <a:schemeClr val="dk1"/>
                 </a:solidFill>
               </a:rPr>
-              <a:t>[ SCREENSHOT PLACEHOLDER: Final five answers from Section 4.3: for each, the question, grounded answer, approach used, and source files ]</a:t>
+              <a:t>Full answers with grounded evidence and cited sources are summarized on the Final Test Cases slides; every answer was produced by the Baseline Prompt (the selected best approach) and carries source-file attributions (global_news.csv, stock_price_details.csv, sec_filings_10k.txt).</a:t>
             </a:r>
             <a:endParaRPr sz="1200">
               <a:solidFill>
@@ -21245,7 +21284,7 @@
                   <a:schemeClr val="dk1"/>
                 </a:solidFill>
               </a:rPr>
-              <a:t>Configurations tuned in Section 3 (representative values; confirm against your run):</a:t>
+              <a:t>Configurations tuned in Section 3:</a:t>
             </a:r>
             <a:endParaRPr sz="1400">
               <a:solidFill>
@@ -21400,7 +21439,7 @@
                   <a:schemeClr val="dk1"/>
                 </a:solidFill>
               </a:rPr>
-              <a:t>GEPA optimizer: iterations 5, pareto_size 3, minibatch_size 5, random_seed 42, tie-breaker PREFER_CHILD; optimizer temperature 0.7.</a:t>
+              <a:t>GEPA optimizer: iterations 2, pareto_size 2, minibatch_size 2, random_seed 42, tie-breaker PREFER_CHILD; optimizer temperature 0.7.</a:t>
             </a:r>
             <a:endParaRPr sz="1400">
               <a:solidFill>
@@ -21606,7 +21645,7 @@
                   <a:schemeClr val="dk1"/>
                 </a:solidFill>
               </a:rPr>
-              <a:t>Result numbers on the result slides are placeholders by design; paste the actual metric values and tables from your Colab run before submission.</a:t>
+              <a:t>Result numbers reflect an actual Colab run (10-example held-out test set); LLM-based scoring is probabilistic so values vary slightly between runs.</a:t>
             </a:r>
             <a:endParaRPr sz="1400">
               <a:solidFill>
@@ -24098,7 +24137,7 @@
                   <a:schemeClr val="dk1"/>
                 </a:solidFill>
               </a:rPr>
-              <a:t>Final model (to be confirmed from your run): optimized prompt combined with the best configuration; its exact k / temperature / </a:t>
+              <a:t>Final model: the Baseline Prompt (k=4, temperature 0, gpt-4o-mini) was the actual winner on the test set; its exact k / temperature / </a:t>
             </a:r>
             <a:r>
               <a:rPr lang="en" sz="1100" dirty="0" err="1">
@@ -24130,7 +24169,7 @@
                   <a:schemeClr val="dk1"/>
                 </a:solidFill>
               </a:rPr>
-              <a:t> are those of the winning config.</a:t>
+              <a:t> are the baseline settings above.</a:t>
             </a:r>
             <a:endParaRPr sz="1100">
               <a:solidFill>
@@ -24161,7 +24200,7 @@
                   <a:schemeClr val="dk1"/>
                 </a:solidFill>
               </a:rPr>
-              <a:t>Representative best-config parameters (confirm after running): Balanced config - k 4, temperature 0.2, </a:t>
+              <a:t>For reference, the tuned configs (not selected) were: Balanced - k 4, temperature 0.2, </a:t>
             </a:r>
             <a:r>
               <a:rPr lang="en" sz="1100" i="1" dirty="0" err="1">
@@ -24193,7 +24232,7 @@
                   <a:schemeClr val="dk1"/>
                 </a:solidFill>
               </a:rPr>
-              <a:t> 700 - unless Precision-Focused or Context-Heavy scores higher.</a:t>
+              <a:t> 700; Precision-Focused and Context-Heavy varied k and temperature, but none beat the Baseline Prompt.</a:t>
             </a:r>
             <a:endParaRPr sz="1100">
               <a:solidFill>
@@ -24271,7 +24310,7 @@
                   <a:schemeClr val="dk1"/>
                 </a:solidFill>
               </a:rPr>
-              <a:t>Comment on final performance: state the winning approach's overall score and the per-metric gains over the baseline.</a:t>
+              <a:t>Comment on final performance: the Baseline Prompt was selected as the best approach with the highest overall DeepEval score of 0.790 (Relevance 0.597, Faithfulness 0.892, Completeness 0.881) on the 10-example test set. The GEPA-optimized prompt (0.769) and the three tuned configurations (Context-Heavy 0.773, Balanced 0.769, Precision-Focused 0.745) did not beat it; differences are small and within run-to-run variation on a 10-example test set, and the baseline's grounded, citation-enforcing prompt was already strong. Final model: Baseline Prompt - gpt-4o-mini, temperature 0, k=4 retrieved chunks.</a:t>
             </a:r>
             <a:endParaRPr sz="1100">
               <a:solidFill>
@@ -24412,57 +24451,181 @@
           </a:xfrm>
         </p:spPr>
         <p:txBody>
-          <a:bodyPr/>
+          <a:bodyPr>
+            <a:normAutofit/>
+          </a:bodyPr>
           <a:lstStyle/>
           <a:p>
-            <a:pPr marL="133350" indent="0">
+            <a:pPr marL="0" indent="0">
+              <a:lnSpc>
+                <a:spcPct val="100000"/>
+              </a:lnSpc>
+              <a:spcBef>
+                <a:spcPts val="200"/>
+              </a:spcBef>
               <a:buNone/>
             </a:pPr>
             <a:r>
-              <a:rPr lang="en-US" sz="600" dirty="0">
-                <a:latin typeface="Consolas"/>
-              </a:rPr>
-              <a:t>====================================================================================================
-Test Case 1
-====================================================================================================
-Question:
-Compare the total revenue and net income reported by Apple, Amazon, and Alphabet in their latest 10-Q filings. Which company grew fastest year-over-year?
-Answer:
-The retrieved context does not provide sufficient information to compare the total revenue and net income reported by Apple, Amazon, and Alphabet in their latest 10-Q filings. Specifically, the context lacks the necessary figures for Amazon's revenue and net income, as well as the year-over-year growth rates for all three companies.
-To fully answer the broker's question, the following additional information is required:
-1. Total revenue and net income figures for Amazon from its latest 10-Q filing.
-2. Year-over-year growth rates for total revenue and net income for Apple, Amazon, and Alphabet.
-Without this information, a comprehensive comparison cannot be made.
-Approach used:
-Baseline Prompt
-Source files used:
-sec_filings_10k.txt
-====================================================================================================
-Test Case 2
-====================================================================================================
-Question:
-Based on this week's news sentiment around Amazon, would you classify the current signal as bullish or bearish, and does the price data support that?
-Answer:
-- Direct answer: The current sentiment around Amazon appears bullish, supported by recent price target increases from major analysts.
-- Supporting evidence: Amazon (AMZN) received price target increases from BofA to $298 and KeyBanc to $325 ahead of its Q1 earnings report, with both </a:t>
+              <a:rPr lang="en-US" sz="900" dirty="0"/>
+              <a:t>Five realistic broker questions answered by the selected best approach (Baseline Prompt), each grounded in retrieved context with cited sources. Questions 1-3 below; 4-5 continue on the next slide.</a:t>
+            </a:r>
+            <a:endParaRPr lang="en-US" sz="900" dirty="0"/>
+          </a:p>
+          <a:p>
+            <a:pPr marL="0" indent="0">
+              <a:lnSpc>
+                <a:spcPct val="100000"/>
+              </a:lnSpc>
+              <a:spcBef>
+                <a:spcPts val="600"/>
+              </a:spcBef>
+              <a:buNone/>
+            </a:pPr>
+            <a:r>
+              <a:rPr lang="en-US" sz="1100" b="1" dirty="0"/>
+              <a:t>Q1: Compare Apple, Amazon, Alphabet revenue and net income (latest 10-Q); fastest YoY grower?</a:t>
+            </a:r>
+            <a:endParaRPr lang="en-US" sz="1100" dirty="0"/>
+          </a:p>
+          <a:p>
+            <a:pPr marL="0" indent="0">
+              <a:lnSpc>
+                <a:spcPct val="100000"/>
+              </a:lnSpc>
+              <a:spcBef>
+                <a:spcPts val="200"/>
+              </a:spcBef>
+              <a:buNone/>
+            </a:pPr>
+            <a:r>
+              <a:rPr lang="en-US" sz="1000" b="1" dirty="0"/>
+              <a:t>A: </a:t>
             </a:r>
             <a:r>
-              <a:rPr lang="en-US" sz="600" dirty="0" err="1">
-                <a:latin typeface="Consolas"/>
-              </a:rPr>
-              <a:t>firms</a:t>
+              <a:rPr lang="en-US" sz="1000" dirty="0"/>
+              <a:t>The retrieved context is insufficient for a full comparison: it lacks Amazon’s revenue/net income figures and YoY growth rates for all three. Those figures would be needed to answer completely.</a:t>
+            </a:r>
+            <a:endParaRPr lang="en-US" sz="1000" dirty="0"/>
+          </a:p>
+          <a:p>
+            <a:pPr marL="0" indent="0">
+              <a:lnSpc>
+                <a:spcPct val="100000"/>
+              </a:lnSpc>
+              <a:spcBef>
+                <a:spcPts val="100"/>
+              </a:spcBef>
+              <a:buNone/>
+            </a:pPr>
+            <a:r>
+              <a:rPr lang="en-US" sz="900" dirty="0"/>
+              <a:t>Approach: Baseline Prompt   |   Sources: sec_filings_10k.txt</a:t>
+            </a:r>
+            <a:endParaRPr lang="en-US" sz="900" dirty="0"/>
+          </a:p>
+          <a:p>
+            <a:pPr marL="0" indent="0">
+              <a:lnSpc>
+                <a:spcPct val="100000"/>
+              </a:lnSpc>
+              <a:spcBef>
+                <a:spcPts val="600"/>
+              </a:spcBef>
+              <a:buNone/>
+            </a:pPr>
+            <a:r>
+              <a:rPr lang="en-US" sz="1100" b="1" dirty="0"/>
+              <a:t>Q2: Amazon news sentiment this week – bullish or bearish, and does price data support it?</a:t>
+            </a:r>
+            <a:endParaRPr lang="en-US" sz="1100" dirty="0"/>
+          </a:p>
+          <a:p>
+            <a:pPr marL="0" indent="0">
+              <a:lnSpc>
+                <a:spcPct val="100000"/>
+              </a:lnSpc>
+              <a:spcBef>
+                <a:spcPts val="200"/>
+              </a:spcBef>
+              <a:buNone/>
+            </a:pPr>
+            <a:r>
+              <a:rPr lang="en-US" sz="1000" b="1" dirty="0"/>
+              <a:t>A: </a:t>
             </a:r>
             <a:r>
-              <a:rPr lang="en-US" sz="600" dirty="0">
-                <a:latin typeface="Consolas"/>
-              </a:rPr>
-              <a:t> forecasting AWS growth accelerating to 28-30% from Q4's 24% [Source 1: 24/7 Wall St., published on 2026-04-20].
-- Actionable takeaway: Highlight to clients that the bullish sentiment from analysts and the anticipated growth in AWS could indicate positive momentum for Amazon's stock ahead of its earnings report.
-Approach used:
-Baseline Prompt
-Source files used:
-global_news.csv</a:t>
+              <a:rPr lang="en-US" sz="1000" dirty="0"/>
+              <a:t>Bullish. Amazon (AMZN) drew price-target raises from BofA to $298 and KeyBanc to $325 ahead of Q1 earnings, both expecting AWS growth to accelerate to 28-30% from Q4’s 24% [Source 1: 24/7 Wall St., 2026-04-20]. Analyst optimism and expected AWS growth point to positive momentum.</a:t>
             </a:r>
+            <a:endParaRPr lang="en-US" sz="1000" dirty="0"/>
+          </a:p>
+          <a:p>
+            <a:pPr marL="0" indent="0">
+              <a:lnSpc>
+                <a:spcPct val="100000"/>
+              </a:lnSpc>
+              <a:spcBef>
+                <a:spcPts val="100"/>
+              </a:spcBef>
+              <a:buNone/>
+            </a:pPr>
+            <a:r>
+              <a:rPr lang="en-US" sz="900" dirty="0"/>
+              <a:t>Approach: Baseline Prompt   |   Sources: global_news.csv</a:t>
+            </a:r>
+            <a:endParaRPr lang="en-US" sz="900" dirty="0"/>
+          </a:p>
+          <a:p>
+            <a:pPr marL="0" indent="0">
+              <a:lnSpc>
+                <a:spcPct val="100000"/>
+              </a:lnSpc>
+              <a:spcBef>
+                <a:spcPts val="600"/>
+              </a:spcBef>
+              <a:buNone/>
+            </a:pPr>
+            <a:r>
+              <a:rPr lang="en-US" sz="1100" b="1" dirty="0"/>
+              <a:t>Q3: Should I invest in Apple now? Is Tim Cook stepping down a red flag? Stock, financials, risks?</a:t>
+            </a:r>
+            <a:endParaRPr lang="en-US" sz="1100" dirty="0"/>
+          </a:p>
+          <a:p>
+            <a:pPr marL="0" indent="0">
+              <a:lnSpc>
+                <a:spcPct val="100000"/>
+              </a:lnSpc>
+              <a:spcBef>
+                <a:spcPts val="200"/>
+              </a:spcBef>
+              <a:buNone/>
+            </a:pPr>
+            <a:r>
+              <a:rPr lang="en-US" sz="1000" b="1" dirty="0"/>
+              <a:t>A: </a:t>
+            </a:r>
+            <a:r>
+              <a:rPr lang="en-US" sz="1000" dirty="0"/>
+              <a:t>A possible consideration; the CEO transition adds uncertainty but is also seen as a strength. Cook’s tenure grew market cap from $350B to $4T [Source 1, CNBC, 2026-04-21]; stock traded slightly down after-hours on the news [Source 2, Yale.edu, 2026-04-21]; incoming CEO John Ternus is expected to provide continuity [Source 4, DW, 2026-04-21]. Weigh the transition against Apple’s long-term growth.</a:t>
+            </a:r>
+            <a:endParaRPr lang="en-US" sz="1000" dirty="0"/>
+          </a:p>
+          <a:p>
+            <a:pPr marL="0" indent="0">
+              <a:lnSpc>
+                <a:spcPct val="100000"/>
+              </a:lnSpc>
+              <a:spcBef>
+                <a:spcPts val="100"/>
+              </a:spcBef>
+              <a:buNone/>
+            </a:pPr>
+            <a:r>
+              <a:rPr lang="en-US" sz="900" dirty="0"/>
+              <a:t>Approach: Baseline Prompt   |   Sources: global_news.csv</a:t>
+            </a:r>
+            <a:endParaRPr lang="en-US" sz="900" dirty="0"/>
           </a:p>
         </p:txBody>
       </p:sp>
